--- a/docs/Valentin-Gateway-Slides.pptx
+++ b/docs/Valentin-Gateway-Slides.pptx
@@ -3775,7 +3775,7 @@
         <p:spPr>
           <a:xfrm>
             <a:off x="457200" y="1024128"/>
-            <a:ext cx="3593592" cy="1115568"/>
+            <a:ext cx="3593592" cy="1188720"/>
           </a:xfrm>
           <a:prstGeom prst="rect">
             <a:avLst/>
@@ -3898,7 +3898,7 @@
         <p:spPr>
           <a:xfrm>
             <a:off x="640080" y="1426464"/>
-            <a:ext cx="3227832" cy="585216"/>
+            <a:ext cx="3227832" cy="658368"/>
           </a:xfrm>
           <a:prstGeom prst="rect">
             <a:avLst/>
@@ -3937,24 +3937,6 @@
               </a:rPr>
               <a:t>src/server/integrations/</a:t>
             </a:r>
-            <a:r>
-              <a:rPr sz="1150" b="0">
-                <a:solidFill>
-                  <a:srgbClr val="16191F"/>
-                </a:solidFill>
-                <a:latin typeface="Calibri"/>
-              </a:rPr>
-              <a:t> — assembled by </a:t>
-            </a:r>
-            <a:r>
-              <a:rPr sz="1100" b="0">
-                <a:solidFill>
-                  <a:srgbClr val="1F77A8"/>
-                </a:solidFill>
-                <a:latin typeface="Consolas"/>
-              </a:rPr>
-              <a:t>buildToolRegistry()</a:t>
-            </a:r>
           </a:p>
         </p:txBody>
       </p:sp>
@@ -3967,7 +3949,7 @@
         <p:spPr>
           <a:xfrm>
             <a:off x="4297679" y="1024128"/>
-            <a:ext cx="3593592" cy="1115568"/>
+            <a:ext cx="3593592" cy="1188720"/>
           </a:xfrm>
           <a:prstGeom prst="rect">
             <a:avLst/>
@@ -4090,7 +4072,7 @@
         <p:spPr>
           <a:xfrm>
             <a:off x="4480559" y="1426464"/>
-            <a:ext cx="3227832" cy="585216"/>
+            <a:ext cx="3227832" cy="658368"/>
           </a:xfrm>
           <a:prstGeom prst="rect">
             <a:avLst/>
@@ -4138,15 +4120,6 @@
               </a:rPr>
               <a:t>propose_*</a:t>
             </a:r>
-            <a:r>
-              <a:rPr sz="1150" b="0">
-                <a:solidFill>
-                  <a:srgbClr val="16191F"/>
-                </a:solidFill>
-                <a:latin typeface="Calibri"/>
-              </a:rPr>
-              <a:t> that cannot act without a human</a:t>
-            </a:r>
           </a:p>
         </p:txBody>
       </p:sp>
@@ -4159,7 +4132,7 @@
         <p:spPr>
           <a:xfrm>
             <a:off x="8138160" y="1024128"/>
-            <a:ext cx="3593592" cy="1115568"/>
+            <a:ext cx="3593592" cy="1188720"/>
           </a:xfrm>
           <a:prstGeom prst="rect">
             <a:avLst/>
@@ -4282,7 +4255,7 @@
         <p:spPr>
           <a:xfrm>
             <a:off x="8321040" y="1426464"/>
-            <a:ext cx="3227832" cy="585216"/>
+            <a:ext cx="3227832" cy="658368"/>
           </a:xfrm>
           <a:prstGeom prst="rect">
             <a:avLst/>
@@ -4341,7 +4314,7 @@
         </p:nvSpPr>
         <p:spPr>
           <a:xfrm>
-            <a:off x="457200" y="2231136"/>
+            <a:off x="457200" y="2304288"/>
             <a:ext cx="11274552" cy="768096"/>
           </a:xfrm>
           <a:prstGeom prst="rect">
@@ -4385,7 +4358,7 @@
         </p:nvSpPr>
         <p:spPr>
           <a:xfrm>
-            <a:off x="658368" y="2331720"/>
+            <a:off x="658368" y="2404872"/>
             <a:ext cx="10872216" cy="219456"/>
           </a:xfrm>
           <a:prstGeom prst="rect">
@@ -4420,7 +4393,7 @@
         </p:nvSpPr>
         <p:spPr>
           <a:xfrm>
-            <a:off x="658368" y="2578608"/>
+            <a:off x="658368" y="2651760"/>
             <a:ext cx="10872216" cy="292607"/>
           </a:xfrm>
           <a:prstGeom prst="rect">
@@ -4491,7 +4464,7 @@
         </p:nvSpPr>
         <p:spPr>
           <a:xfrm>
-            <a:off x="457200" y="3127248"/>
+            <a:off x="457200" y="3182112"/>
             <a:ext cx="5513832" cy="1920240"/>
           </a:xfrm>
           <a:prstGeom prst="rect">
@@ -4535,7 +4508,7 @@
         </p:nvSpPr>
         <p:spPr>
           <a:xfrm>
-            <a:off x="457200" y="3127248"/>
+            <a:off x="457200" y="3182112"/>
             <a:ext cx="41148" cy="1920240"/>
           </a:xfrm>
           <a:prstGeom prst="rect">
@@ -4579,7 +4552,7 @@
         </p:nvSpPr>
         <p:spPr>
           <a:xfrm>
-            <a:off x="640080" y="3246120"/>
+            <a:off x="640080" y="3300984"/>
             <a:ext cx="5148072" cy="237744"/>
           </a:xfrm>
           <a:prstGeom prst="rect">
@@ -4623,7 +4596,7 @@
         </p:nvSpPr>
         <p:spPr>
           <a:xfrm>
-            <a:off x="640080" y="3529584"/>
+            <a:off x="640080" y="3584448"/>
             <a:ext cx="5148072" cy="1389888"/>
           </a:xfrm>
           <a:prstGeom prst="rect">
@@ -4817,7 +4790,7 @@
         </p:nvSpPr>
         <p:spPr>
           <a:xfrm>
-            <a:off x="6217920" y="3127248"/>
+            <a:off x="6217920" y="3182112"/>
             <a:ext cx="5513832" cy="1920240"/>
           </a:xfrm>
           <a:prstGeom prst="rect">
@@ -4861,7 +4834,7 @@
         </p:nvSpPr>
         <p:spPr>
           <a:xfrm>
-            <a:off x="6217920" y="3127248"/>
+            <a:off x="6217920" y="3182112"/>
             <a:ext cx="41148" cy="1920240"/>
           </a:xfrm>
           <a:prstGeom prst="rect">
@@ -4905,7 +4878,7 @@
         </p:nvSpPr>
         <p:spPr>
           <a:xfrm>
-            <a:off x="6400800" y="3246120"/>
+            <a:off x="6400800" y="3300984"/>
             <a:ext cx="5148072" cy="237744"/>
           </a:xfrm>
           <a:prstGeom prst="rect">
@@ -4949,7 +4922,7 @@
         </p:nvSpPr>
         <p:spPr>
           <a:xfrm>
-            <a:off x="6400800" y="3529584"/>
+            <a:off x="6400800" y="3584448"/>
             <a:ext cx="5148072" cy="1389888"/>
           </a:xfrm>
           <a:prstGeom prst="rect">
@@ -5125,8 +5098,8 @@
         </p:nvSpPr>
         <p:spPr>
           <a:xfrm>
-            <a:off x="457200" y="5175504"/>
-            <a:ext cx="11274552" cy="1060704"/>
+            <a:off x="457200" y="5212080"/>
+            <a:ext cx="11274552" cy="1115568"/>
           </a:xfrm>
           <a:prstGeom prst="rect">
             <a:avLst/>
@@ -5169,7 +5142,7 @@
         </p:nvSpPr>
         <p:spPr>
           <a:xfrm>
-            <a:off x="658368" y="5276088"/>
+            <a:off x="658368" y="5312664"/>
             <a:ext cx="10872216" cy="219456"/>
           </a:xfrm>
           <a:prstGeom prst="rect">
@@ -5204,8 +5177,8 @@
         </p:nvSpPr>
         <p:spPr>
           <a:xfrm>
-            <a:off x="658368" y="5522976"/>
-            <a:ext cx="10872216" cy="585215"/>
+            <a:off x="658368" y="5559552"/>
+            <a:ext cx="10872216" cy="640080"/>
           </a:xfrm>
           <a:prstGeom prst="rect">
             <a:avLst/>
@@ -5497,7 +5470,7 @@
                 </a:solidFill>
                 <a:latin typeface="Calibri"/>
               </a:rPr>
-              <a:t>What the AgentCore Gateway costs — </a:t>
+              <a:t>What AgentCore Gateway costs — </a:t>
             </a:r>
             <a:r>
               <a:rPr sz="2700" b="0">
@@ -5506,7 +5479,7 @@
                 </a:solidFill>
                 <a:latin typeface="Calibri"/>
               </a:rPr>
-              <a:t>two meters on unrelated clocks</a:t>
+              <a:t>two meters, not one price</a:t>
             </a:r>
           </a:p>
         </p:txBody>
